--- a/dist/초5/사회·역사/역사와생활/초5_사회·역사_역사와생활_02_삼국과남북국.pptx
+++ b/dist/초5/사회·역사/역사와생활/초5_사회·역사_역사와생활_02_삼국과남북국.pptx
@@ -120,13 +120,13 @@
   <p:extLst>
     <p:ext uri="{521415D9-36F7-43E2-AB2F-B90AF26B5E84}">
       <p14:sectionLst xmlns:p14="http://schemas.microsoft.com/office/powerpoint/2010/main">
-        <p14:section name="도입" id="{59f362e6-6313-f549-4a8e-61fe0a366efb}">
+        <p14:section name="도입" id="{efba539e-241f-654e-ed19-f04d87f3ad93}">
           <p14:sldIdLst>
             <p14:sldId id="256"/>
             <p14:sldId id="257"/>
           </p14:sldIdLst>
         </p14:section>
-        <p14:section name="개념" id="{8af663d8-a6f1-2814-51f2-6e5b739ab5e6}">
+        <p14:section name="개념" id="{a48b38ba-2415-88c1-82f3-715755a6d27a}">
           <p14:sldIdLst>
             <p14:sldId id="258"/>
             <p14:sldId id="259"/>
@@ -135,31 +135,31 @@
             <p14:sldId id="263"/>
           </p14:sldIdLst>
         </p14:section>
-        <p14:section name="연습" id="{47342b31-6240-efdc-ecc5-ff40a3dba8f0}">
+        <p14:section name="연습" id="{bc90fb76-2fed-522c-3f5b-08643cb63a46}">
           <p14:sldIdLst>
             <p14:sldId id="261"/>
             <p14:sldId id="264"/>
             <p14:sldId id="265"/>
           </p14:sldIdLst>
         </p14:section>
-        <p14:section name="개념" id="{479ad4b5-0951-6067-8a3b-b0e662730a1c}">
+        <p14:section name="개념" id="{03bf2ee0-c566-4efc-485c-f1475270900e}">
           <p14:sldIdLst/>
         </p14:section>
-        <p14:section name="연습" id="{aaf4b22c-f5de-1a78-8836-bec3426514d4}">
+        <p14:section name="연습" id="{37e0a425-920d-3b4d-5c4a-c24293b3438e}">
           <p14:sldIdLst/>
         </p14:section>
-        <p14:section name="확인" id="{5424638b-f607-faaa-35ba-83e24ff14955}">
+        <p14:section name="확인" id="{97a49755-d144-21db-8aec-dafd2ff0a37f}">
           <p14:sldIdLst>
             <p14:sldId id="266"/>
             <p14:sldId id="267"/>
           </p14:sldIdLst>
         </p14:section>
-        <p14:section name="정리" id="{6ae343ec-92aa-6b00-0095-b9837f0c7793}">
+        <p14:section name="정리" id="{f71c25a6-70c2-f397-7acf-496f59c8a135}">
           <p14:sldIdLst>
             <p14:sldId id="268"/>
           </p14:sldIdLst>
         </p14:section>
-        <p14:section name="보충" id="{69000c3f-9bd6-9ab0-b272-61bc15980eac}">
+        <p14:section name="보충" id="{633a47fd-3dc6-927d-6254-afbbe223a769}">
           <p14:sldIdLst>
             <p14:sldId id="269"/>
           </p14:sldIdLst>
@@ -9538,7 +9538,28 @@
                           <a:ea typeface="맑은 고딕" pitchFamily="34" charset="-122"/>
                           <a:cs typeface="맑은 고딕" pitchFamily="34" charset="-120"/>
                         </a:rPr>
-                        <a:t>금동 대향로: 산·사람·동물을 섬세하게 새긴 향로</a:t>
+                        <a:t>금동 대향로</a:t>
+                      </a:r>
+                      <a:endParaRPr lang="en-US" sz="2400" dirty="0">
+                        <a:latin typeface="맑은 고딕" charset="0"/>
+                        <a:ea typeface="맑은 고딕" charset="0"/>
+                        <a:cs typeface="맑은 고딕" charset="0"/>
+                      </a:endParaRPr>
+                    </a:p>
+                    <a:p>
+                      <a:pPr eaLnBrk="0" algn="ctr" indent="0" marL="0">
+                        <a:buNone/>
+                      </a:pPr>
+                      <a:r>
+                        <a:rPr lang="en-US" sz="2400" dirty="0">
+                          <a:solidFill>
+                            <a:srgbClr val="1F2937"/>
+                          </a:solidFill>
+                          <a:latin typeface="맑은 고딕" pitchFamily="34" charset="0"/>
+                          <a:ea typeface="맑은 고딕" pitchFamily="34" charset="-122"/>
+                          <a:cs typeface="맑은 고딕" pitchFamily="34" charset="-120"/>
+                        </a:rPr>
+                        <a:t>산·사람·동물을 섬세하게 새김</a:t>
                       </a:r>
                       <a:endParaRPr lang="en-US" sz="2400" dirty="0">
                         <a:latin typeface="맑은 고딕" charset="0"/>
@@ -9606,7 +9627,28 @@
                           <a:ea typeface="맑은 고딕" pitchFamily="34" charset="-122"/>
                           <a:cs typeface="맑은 고딕" pitchFamily="34" charset="-120"/>
                         </a:rPr>
-                        <a:t>금속을 다루는 솜씨가 뛰어났어요.</a:t>
+                        <a:t>금속을 다루는 솜씨가</a:t>
+                      </a:r>
+                      <a:endParaRPr lang="en-US" sz="2400" dirty="0">
+                        <a:latin typeface="맑은 고딕" charset="0"/>
+                        <a:ea typeface="맑은 고딕" charset="0"/>
+                        <a:cs typeface="맑은 고딕" charset="0"/>
+                      </a:endParaRPr>
+                    </a:p>
+                    <a:p>
+                      <a:pPr eaLnBrk="0" algn="ctr" indent="0" marL="0">
+                        <a:buNone/>
+                      </a:pPr>
+                      <a:r>
+                        <a:rPr lang="en-US" sz="2400" dirty="0">
+                          <a:solidFill>
+                            <a:srgbClr val="1F2937"/>
+                          </a:solidFill>
+                          <a:latin typeface="맑은 고딕" pitchFamily="34" charset="0"/>
+                          <a:ea typeface="맑은 고딕" pitchFamily="34" charset="-122"/>
+                          <a:cs typeface="맑은 고딕" pitchFamily="34" charset="-120"/>
+                        </a:rPr>
+                        <a:t>뛰어났어요.</a:t>
                       </a:r>
                       <a:endParaRPr lang="en-US" sz="2400" dirty="0">
                         <a:latin typeface="맑은 고딕" charset="0"/>
@@ -9744,7 +9786,28 @@
                           <a:ea typeface="맑은 고딕" pitchFamily="34" charset="-122"/>
                           <a:cs typeface="맑은 고딕" pitchFamily="34" charset="-120"/>
                         </a:rPr>
-                        <a:t>금관: 나뭇가지와 사슴뿔 모양으로 꾸민 금 관</a:t>
+                        <a:t>금관</a:t>
+                      </a:r>
+                      <a:endParaRPr lang="en-US" sz="2400" dirty="0">
+                        <a:latin typeface="맑은 고딕" charset="0"/>
+                        <a:ea typeface="맑은 고딕" charset="0"/>
+                        <a:cs typeface="맑은 고딕" charset="0"/>
+                      </a:endParaRPr>
+                    </a:p>
+                    <a:p>
+                      <a:pPr eaLnBrk="0" algn="ctr" indent="0" marL="0">
+                        <a:buNone/>
+                      </a:pPr>
+                      <a:r>
+                        <a:rPr lang="en-US" sz="2400" dirty="0">
+                          <a:solidFill>
+                            <a:srgbClr val="1F2937"/>
+                          </a:solidFill>
+                          <a:latin typeface="맑은 고딕" pitchFamily="34" charset="0"/>
+                          <a:ea typeface="맑은 고딕" pitchFamily="34" charset="-122"/>
+                          <a:cs typeface="맑은 고딕" pitchFamily="34" charset="-120"/>
+                        </a:rPr>
+                        <a:t>나뭇가지·사슴뿔 모양 장식</a:t>
                       </a:r>
                       <a:endParaRPr lang="en-US" sz="2400" dirty="0">
                         <a:latin typeface="맑은 고딕" charset="0"/>

--- a/dist/초5/사회·역사/역사와생활/초5_사회·역사_역사와생활_02_삼국과남북국.pptx
+++ b/dist/초5/사회·역사/역사와생활/초5_사회·역사_역사와생활_02_삼국과남북국.pptx
@@ -120,13 +120,13 @@
   <p:extLst>
     <p:ext uri="{521415D9-36F7-43E2-AB2F-B90AF26B5E84}">
       <p14:sectionLst xmlns:p14="http://schemas.microsoft.com/office/powerpoint/2010/main">
-        <p14:section name="도입" id="{efba539e-241f-654e-ed19-f04d87f3ad93}">
+        <p14:section name="도입" id="{7273261d-69ae-f931-eb8c-4049fb6be822}">
           <p14:sldIdLst>
             <p14:sldId id="256"/>
             <p14:sldId id="257"/>
           </p14:sldIdLst>
         </p14:section>
-        <p14:section name="개념" id="{a48b38ba-2415-88c1-82f3-715755a6d27a}">
+        <p14:section name="개념" id="{cd785392-de70-f801-ff98-099d8dcf68ac}">
           <p14:sldIdLst>
             <p14:sldId id="258"/>
             <p14:sldId id="259"/>
@@ -135,31 +135,31 @@
             <p14:sldId id="263"/>
           </p14:sldIdLst>
         </p14:section>
-        <p14:section name="연습" id="{bc90fb76-2fed-522c-3f5b-08643cb63a46}">
+        <p14:section name="연습" id="{5d7d855c-67d3-d939-08f4-8b70bd5eb27a}">
           <p14:sldIdLst>
             <p14:sldId id="261"/>
             <p14:sldId id="264"/>
             <p14:sldId id="265"/>
           </p14:sldIdLst>
         </p14:section>
-        <p14:section name="개념" id="{03bf2ee0-c566-4efc-485c-f1475270900e}">
+        <p14:section name="개념" id="{696cb286-fc65-2f4b-8c70-4df21e738229}">
           <p14:sldIdLst/>
         </p14:section>
-        <p14:section name="연습" id="{37e0a425-920d-3b4d-5c4a-c24293b3438e}">
+        <p14:section name="연습" id="{b1285ff5-1fd3-fdae-06aa-124da8f2827d}">
           <p14:sldIdLst/>
         </p14:section>
-        <p14:section name="확인" id="{97a49755-d144-21db-8aec-dafd2ff0a37f}">
+        <p14:section name="확인" id="{5c84c52b-e549-4621-9a16-82db1e25a57f}">
           <p14:sldIdLst>
             <p14:sldId id="266"/>
             <p14:sldId id="267"/>
           </p14:sldIdLst>
         </p14:section>
-        <p14:section name="정리" id="{f71c25a6-70c2-f397-7acf-496f59c8a135}">
+        <p14:section name="정리" id="{5fbd87aa-1f45-e45e-c6d6-c167b43f4e74}">
           <p14:sldIdLst>
             <p14:sldId id="268"/>
           </p14:sldIdLst>
         </p14:section>
-        <p14:section name="보충" id="{633a47fd-3dc6-927d-6254-afbbe223a769}">
+        <p14:section name="보충" id="{07924bf6-f9fc-a9ca-8881-6891e7df8490}">
           <p14:sldIdLst>
             <p14:sldId id="269"/>
           </p14:sldIdLst>

--- a/dist/초5/사회·역사/역사와생활/초5_사회·역사_역사와생활_02_삼국과남북국.pptx
+++ b/dist/초5/사회·역사/역사와생활/초5_사회·역사_역사와생활_02_삼국과남북국.pptx
@@ -120,13 +120,13 @@
   <p:extLst>
     <p:ext uri="{521415D9-36F7-43E2-AB2F-B90AF26B5E84}">
       <p14:sectionLst xmlns:p14="http://schemas.microsoft.com/office/powerpoint/2010/main">
-        <p14:section name="도입" id="{7273261d-69ae-f931-eb8c-4049fb6be822}">
+        <p14:section name="도입" id="{1b52bec8-f1e5-6bd3-5b12-d0b4ff316caf}">
           <p14:sldIdLst>
             <p14:sldId id="256"/>
             <p14:sldId id="257"/>
           </p14:sldIdLst>
         </p14:section>
-        <p14:section name="개념" id="{cd785392-de70-f801-ff98-099d8dcf68ac}">
+        <p14:section name="개념" id="{f64301b1-e5a0-7a00-8430-aa0a4b7e3fe7}">
           <p14:sldIdLst>
             <p14:sldId id="258"/>
             <p14:sldId id="259"/>
@@ -135,31 +135,31 @@
             <p14:sldId id="263"/>
           </p14:sldIdLst>
         </p14:section>
-        <p14:section name="연습" id="{5d7d855c-67d3-d939-08f4-8b70bd5eb27a}">
+        <p14:section name="연습" id="{03320e88-a794-77a7-945d-7480e871401b}">
           <p14:sldIdLst>
             <p14:sldId id="261"/>
             <p14:sldId id="264"/>
             <p14:sldId id="265"/>
           </p14:sldIdLst>
         </p14:section>
-        <p14:section name="개념" id="{696cb286-fc65-2f4b-8c70-4df21e738229}">
+        <p14:section name="개념" id="{b89de067-7e98-aae8-8cb0-bffac74d9731}">
           <p14:sldIdLst/>
         </p14:section>
-        <p14:section name="연습" id="{b1285ff5-1fd3-fdae-06aa-124da8f2827d}">
+        <p14:section name="연습" id="{6b9fa3ff-2abe-534f-d24d-1101d7e152cc}">
           <p14:sldIdLst/>
         </p14:section>
-        <p14:section name="확인" id="{5c84c52b-e549-4621-9a16-82db1e25a57f}">
+        <p14:section name="확인" id="{c6ebf457-9bac-53cc-8b46-db84f20c634c}">
           <p14:sldIdLst>
             <p14:sldId id="266"/>
             <p14:sldId id="267"/>
           </p14:sldIdLst>
         </p14:section>
-        <p14:section name="정리" id="{5fbd87aa-1f45-e45e-c6d6-c167b43f4e74}">
+        <p14:section name="정리" id="{a4b6c750-8ea1-351f-1e25-3d1aab511a1c}">
           <p14:sldIdLst>
             <p14:sldId id="268"/>
           </p14:sldIdLst>
         </p14:section>
-        <p14:section name="보충" id="{07924bf6-f9fc-a9ca-8881-6891e7df8490}">
+        <p14:section name="보충" id="{9996a9d4-3138-acbe-04e0-df9f3c316540}">
           <p14:sldIdLst>
             <p14:sldId id="269"/>
           </p14:sldIdLst>
